--- a/data/Database_Services_Roadmap_DRAFT_V2.pptx
+++ b/data/Database_Services_Roadmap_DRAFT_V2.pptx
@@ -385,11 +385,11 @@
           </c:val>
         </c:ser>
         <c:dLbls/>
-        <c:axId val="188063744"/>
-        <c:axId val="188065280"/>
+        <c:axId val="179089792"/>
+        <c:axId val="179091328"/>
       </c:radarChart>
       <c:catAx>
-        <c:axId val="188063744"/>
+        <c:axId val="179089792"/>
         <c:scaling>
           <c:orientation val="minMax"/>
         </c:scaling>
@@ -420,7 +420,7 @@
             <a:endParaRPr lang="en-US"/>
           </a:p>
         </c:txPr>
-        <c:crossAx val="188065280"/>
+        <c:crossAx val="179091328"/>
         <c:crosses val="autoZero"/>
         <c:auto val="1"/>
         <c:lblAlgn val="ctr"/>
@@ -428,7 +428,7 @@
         <c:noMultiLvlLbl val="1"/>
       </c:catAx>
       <c:valAx>
-        <c:axId val="188065280"/>
+        <c:axId val="179091328"/>
         <c:scaling>
           <c:orientation val="minMax"/>
           <c:max val="5"/>
@@ -472,7 +472,7 @@
             <a:endParaRPr lang="en-US"/>
           </a:p>
         </c:txPr>
-        <c:crossAx val="188063744"/>
+        <c:crossAx val="179089792"/>
         <c:crosses val="autoZero"/>
         <c:crossBetween val="between"/>
       </c:valAx>
@@ -14442,7 +14442,7 @@
         </p:nvGraphicFramePr>
         <p:xfrm>
           <a:off x="457200" y="1371600"/>
-          <a:ext cx="11247120" cy="914400"/>
+          <a:ext cx="11247120" cy="4526280"/>
         </p:xfrm>
         <a:graphic>
           <a:graphicData uri="http://schemas.openxmlformats.org/drawingml/2006/table">
@@ -17764,7 +17764,7 @@
         </p:nvGraphicFramePr>
         <p:xfrm>
           <a:off x="457200" y="1188720"/>
-          <a:ext cx="11247120" cy="914400"/>
+          <a:ext cx="11247120" cy="4114800"/>
         </p:xfrm>
         <a:graphic>
           <a:graphicData uri="http://schemas.openxmlformats.org/drawingml/2006/table">
@@ -19928,7 +19928,7 @@
         </p:nvGraphicFramePr>
         <p:xfrm>
           <a:off x="457200" y="1280160"/>
-          <a:ext cx="11247120" cy="914400"/>
+          <a:ext cx="11247120" cy="3785616"/>
         </p:xfrm>
         <a:graphic>
           <a:graphicData uri="http://schemas.openxmlformats.org/drawingml/2006/table">
@@ -25115,7 +25115,7 @@
         </p:nvGraphicFramePr>
         <p:xfrm>
           <a:off x="457200" y="1188720"/>
-          <a:ext cx="11247120" cy="914400"/>
+          <a:ext cx="11247120" cy="4937760"/>
         </p:xfrm>
         <a:graphic>
           <a:graphicData uri="http://schemas.openxmlformats.org/drawingml/2006/table">
@@ -38704,7 +38704,7 @@
         <p:spPr>
           <a:xfrm>
             <a:off x="457200" y="1051560"/>
-            <a:ext cx="11247120" cy="365760"/>
+            <a:ext cx="11247120" cy="457200"/>
           </a:xfrm>
           <a:prstGeom prst="rect">
             <a:avLst/>
@@ -38728,7 +38728,7 @@
                 <a:ea typeface="Calibri" pitchFamily="34" charset="-122"/>
                 <a:cs typeface="Calibri" pitchFamily="34" charset="-120"/>
               </a:rPr>
-              <a:t>Most areas below are now confirmed technology direction rather than hypotheses. Technical debt is low across the estate overall — DB2 is the one area still framed as a genuine pain point.</a:t>
+              <a:t>These focus areas translate database platform priorities into measurable opportunities that advance standardization, modernization, resilience, and operational efficiency by 2028.</a:t>
             </a:r>
             <a:endParaRPr lang="en-US" sz="1200" dirty="0"/>
           </a:p>
@@ -38742,16 +38742,16 @@
         </p:nvSpPr>
         <p:spPr>
           <a:xfrm>
-            <a:off x="457200" y="1463040"/>
-            <a:ext cx="11247120" cy="960120"/>
+            <a:off x="457200" y="1691640"/>
+            <a:ext cx="5120640" cy="457200"/>
           </a:xfrm>
           <a:prstGeom prst="roundRect">
             <a:avLst>
-              <a:gd name="adj" fmla="val 5714"/>
+              <a:gd name="adj" fmla="val 12000"/>
             </a:avLst>
           </a:prstGeom>
           <a:solidFill>
-            <a:srgbClr val="F2DDAC"/>
+            <a:srgbClr val="BA0C2F"/>
           </a:solidFill>
           <a:ln/>
           <a:effectLst>
@@ -38765,34 +38765,141 @@
       </p:sp>
       <p:sp>
         <p:nvSpPr>
-          <p:cNvPr id="9" name="Shape 7"/>
-          <p:cNvSpPr/>
-          <p:nvPr/>
-        </p:nvSpPr>
-        <p:spPr>
-          <a:xfrm>
-            <a:off x="640080" y="1627632"/>
-            <a:ext cx="502920" cy="502920"/>
+          <p:cNvPr id="9" name="Text 7"/>
+          <p:cNvSpPr/>
+          <p:nvPr/>
+        </p:nvSpPr>
+        <p:spPr>
+          <a:xfrm>
+            <a:off x="457200" y="1691640"/>
+            <a:ext cx="5120640" cy="457200"/>
+          </a:xfrm>
+          <a:prstGeom prst="rect">
+            <a:avLst/>
+          </a:prstGeom>
+          <a:noFill/>
+          <a:ln/>
+        </p:spPr>
+        <p:txBody>
+          <a:bodyPr wrap="square" rtlCol="0" anchor="ctr"/>
+          <a:lstStyle/>
+          <a:p>
+            <a:pPr marL="0" indent="0" algn="ctr">
+              <a:buNone/>
+            </a:pPr>
+            <a:r>
+              <a:rPr lang="en-US" sz="1500" b="1" dirty="0">
+                <a:solidFill>
+                  <a:srgbClr val="FFFFFF"/>
+                </a:solidFill>
+                <a:latin typeface="Calibri" pitchFamily="34" charset="0"/>
+                <a:ea typeface="Calibri" pitchFamily="34" charset="-122"/>
+                <a:cs typeface="Calibri" pitchFamily="34" charset="-120"/>
+              </a:rPr>
+              <a:t>Strategic Focus Areas</a:t>
+            </a:r>
+            <a:endParaRPr lang="en-US" sz="1500" dirty="0"/>
+          </a:p>
+        </p:txBody>
+      </p:sp>
+      <p:sp>
+        <p:nvSpPr>
+          <p:cNvPr id="10" name="Shape 8"/>
+          <p:cNvSpPr/>
+          <p:nvPr/>
+        </p:nvSpPr>
+        <p:spPr>
+          <a:xfrm>
+            <a:off x="6611112" y="1691640"/>
+            <a:ext cx="5120640" cy="457200"/>
+          </a:xfrm>
+          <a:prstGeom prst="roundRect">
+            <a:avLst>
+              <a:gd name="adj" fmla="val 12000"/>
+            </a:avLst>
+          </a:prstGeom>
+          <a:solidFill>
+            <a:srgbClr val="BA0C2F"/>
+          </a:solidFill>
+          <a:ln/>
+          <a:effectLst>
+            <a:outerShdw blurRad="50800" dist="25400" dir="5400000" algn="bl" rotWithShape="0">
+              <a:srgbClr val="808080">
+                <a:alpha val="20000"/>
+              </a:srgbClr>
+            </a:outerShdw>
+          </a:effectLst>
+        </p:spPr>
+      </p:sp>
+      <p:sp>
+        <p:nvSpPr>
+          <p:cNvPr id="11" name="Text 9"/>
+          <p:cNvSpPr/>
+          <p:nvPr/>
+        </p:nvSpPr>
+        <p:spPr>
+          <a:xfrm>
+            <a:off x="6611112" y="1691640"/>
+            <a:ext cx="5120640" cy="457200"/>
+          </a:xfrm>
+          <a:prstGeom prst="rect">
+            <a:avLst/>
+          </a:prstGeom>
+          <a:noFill/>
+          <a:ln/>
+        </p:spPr>
+        <p:txBody>
+          <a:bodyPr wrap="square" rtlCol="0" anchor="ctr"/>
+          <a:lstStyle/>
+          <a:p>
+            <a:pPr marL="0" indent="0" algn="ctr">
+              <a:buNone/>
+            </a:pPr>
+            <a:r>
+              <a:rPr lang="en-US" sz="1500" b="1" dirty="0">
+                <a:solidFill>
+                  <a:srgbClr val="FFFFFF"/>
+                </a:solidFill>
+                <a:latin typeface="Calibri" pitchFamily="34" charset="0"/>
+                <a:ea typeface="Calibri" pitchFamily="34" charset="-122"/>
+                <a:cs typeface="Calibri" pitchFamily="34" charset="-120"/>
+              </a:rPr>
+              <a:t>Transformation Opportunities</a:t>
+            </a:r>
+            <a:endParaRPr lang="en-US" sz="1500" dirty="0"/>
+          </a:p>
+        </p:txBody>
+      </p:sp>
+      <p:sp>
+        <p:nvSpPr>
+          <p:cNvPr id="12" name="Shape 10"/>
+          <p:cNvSpPr/>
+          <p:nvPr/>
+        </p:nvSpPr>
+        <p:spPr>
+          <a:xfrm>
+            <a:off x="5838444" y="3959352"/>
+            <a:ext cx="512064" cy="512064"/>
           </a:xfrm>
           <a:prstGeom prst="ellipse">
             <a:avLst/>
           </a:prstGeom>
           <a:solidFill>
-            <a:srgbClr val="8C0924"/>
+            <a:srgbClr val="BA0C2F"/>
           </a:solidFill>
           <a:ln/>
         </p:spPr>
       </p:sp>
       <p:sp>
         <p:nvSpPr>
-          <p:cNvPr id="10" name="Text 8"/>
-          <p:cNvSpPr/>
-          <p:nvPr/>
-        </p:nvSpPr>
-        <p:spPr>
-          <a:xfrm>
-            <a:off x="640080" y="1627632"/>
-            <a:ext cx="502920" cy="502920"/>
+          <p:cNvPr id="13" name="Text 11"/>
+          <p:cNvSpPr/>
+          <p:nvPr/>
+        </p:nvSpPr>
+        <p:spPr>
+          <a:xfrm>
+            <a:off x="5838444" y="3959352"/>
+            <a:ext cx="512064" cy="512064"/>
           </a:xfrm>
           <a:prstGeom prst="rect">
             <a:avLst/>
@@ -38816,7 +38923,7 @@
                 <a:ea typeface="Calibri" pitchFamily="34" charset="-122"/>
                 <a:cs typeface="Calibri" pitchFamily="34" charset="-120"/>
               </a:rPr>
-              <a:t>✓</a:t>
+              <a:t>»</a:t>
             </a:r>
             <a:endParaRPr lang="en-US" sz="1200" dirty="0"/>
           </a:p>
@@ -38824,14 +38931,73 @@
       </p:sp>
       <p:sp>
         <p:nvSpPr>
-          <p:cNvPr id="11" name="Text 9"/>
-          <p:cNvSpPr/>
-          <p:nvPr/>
-        </p:nvSpPr>
-        <p:spPr>
-          <a:xfrm>
-            <a:off x="1280160" y="1536192"/>
-            <a:ext cx="9875520" cy="365760"/>
+          <p:cNvPr id="14" name="Shape 12"/>
+          <p:cNvSpPr/>
+          <p:nvPr/>
+        </p:nvSpPr>
+        <p:spPr>
+          <a:xfrm>
+            <a:off x="594360" y="2276856"/>
+            <a:ext cx="384048" cy="384048"/>
+          </a:xfrm>
+          <a:prstGeom prst="ellipse">
+            <a:avLst/>
+          </a:prstGeom>
+          <a:solidFill>
+            <a:srgbClr val="BA0C2F"/>
+          </a:solidFill>
+          <a:ln/>
+        </p:spPr>
+      </p:sp>
+      <p:sp>
+        <p:nvSpPr>
+          <p:cNvPr id="15" name="Text 13"/>
+          <p:cNvSpPr/>
+          <p:nvPr/>
+        </p:nvSpPr>
+        <p:spPr>
+          <a:xfrm>
+            <a:off x="594360" y="2276856"/>
+            <a:ext cx="384048" cy="384048"/>
+          </a:xfrm>
+          <a:prstGeom prst="rect">
+            <a:avLst/>
+          </a:prstGeom>
+          <a:noFill/>
+          <a:ln/>
+        </p:spPr>
+        <p:txBody>
+          <a:bodyPr wrap="square" rtlCol="0" anchor="ctr"/>
+          <a:lstStyle/>
+          <a:p>
+            <a:pPr marL="0" indent="0" algn="ctr">
+              <a:buNone/>
+            </a:pPr>
+            <a:r>
+              <a:rPr lang="en-US" sz="1200" b="1" dirty="0">
+                <a:solidFill>
+                  <a:srgbClr val="FFFFFF"/>
+                </a:solidFill>
+                <a:latin typeface="Calibri" pitchFamily="34" charset="0"/>
+                <a:ea typeface="Calibri" pitchFamily="34" charset="-122"/>
+                <a:cs typeface="Calibri" pitchFamily="34" charset="-120"/>
+              </a:rPr>
+              <a:t>P</a:t>
+            </a:r>
+            <a:endParaRPr lang="en-US" sz="1200" dirty="0"/>
+          </a:p>
+        </p:txBody>
+      </p:sp>
+      <p:sp>
+        <p:nvSpPr>
+          <p:cNvPr id="16" name="Text 14"/>
+          <p:cNvSpPr/>
+          <p:nvPr/>
+        </p:nvSpPr>
+        <p:spPr>
+          <a:xfrm>
+            <a:off x="1078992" y="2221992"/>
+            <a:ext cx="4343400" cy="292608"/>
           </a:xfrm>
           <a:prstGeom prst="rect">
             <a:avLst/>
@@ -38847,30 +39013,182 @@
               <a:buNone/>
             </a:pPr>
             <a:r>
-              <a:rPr lang="en-US" sz="1500" b="1" dirty="0">
+              <a:rPr lang="en-US" sz="1200" b="1" dirty="0">
                 <a:solidFill>
-                  <a:srgbClr val="8C0924"/>
+                  <a:srgbClr val="2E2E38"/>
                 </a:solidFill>
                 <a:latin typeface="Calibri" pitchFamily="34" charset="0"/>
                 <a:ea typeface="Calibri" pitchFamily="34" charset="-122"/>
                 <a:cs typeface="Calibri" pitchFamily="34" charset="-120"/>
               </a:rPr>
-              <a:t>CONFIRMED — Oracle Exadata Cloud Migration (Exa@Azure)</a:t>
+              <a:t>Platform Standardization &amp; Consolidation</a:t>
             </a:r>
-            <a:endParaRPr lang="en-US" sz="1500" dirty="0"/>
+            <a:endParaRPr lang="en-US" sz="1200" dirty="0"/>
           </a:p>
         </p:txBody>
       </p:sp>
       <p:sp>
         <p:nvSpPr>
-          <p:cNvPr id="12" name="Text 10"/>
-          <p:cNvSpPr/>
-          <p:nvPr/>
-        </p:nvSpPr>
-        <p:spPr>
-          <a:xfrm>
-            <a:off x="1280160" y="1901952"/>
-            <a:ext cx="10241280" cy="457200"/>
+          <p:cNvPr id="17" name="Text 15"/>
+          <p:cNvSpPr/>
+          <p:nvPr/>
+        </p:nvSpPr>
+        <p:spPr>
+          <a:xfrm>
+            <a:off x="1078992" y="2532888"/>
+            <a:ext cx="4343400" cy="594360"/>
+          </a:xfrm>
+          <a:prstGeom prst="rect">
+            <a:avLst/>
+          </a:prstGeom>
+          <a:noFill/>
+          <a:ln/>
+        </p:spPr>
+        <p:txBody>
+          <a:bodyPr wrap="square" rtlCol="0" anchor="t"/>
+          <a:lstStyle/>
+          <a:p>
+            <a:pPr marL="177800" indent="-177800">
+              <a:spcAft>
+                <a:spcPts val="800"/>
+              </a:spcAft>
+              <a:buSzPct val="100000"/>
+              <a:buChar char="•"/>
+            </a:pPr>
+            <a:r>
+              <a:rPr lang="en-US" sz="950" dirty="0">
+                <a:solidFill>
+                  <a:srgbClr val="2E2E38"/>
+                </a:solidFill>
+                <a:latin typeface="Calibri" pitchFamily="34" charset="0"/>
+                <a:ea typeface="Calibri" pitchFamily="34" charset="-122"/>
+                <a:cs typeface="Calibri" pitchFamily="34" charset="-120"/>
+              </a:rPr>
+              <a:t>Standardize MS SQL on Azure SQL MI / AWS RDS</a:t>
+            </a:r>
+            <a:endParaRPr lang="en-US" sz="950" dirty="0"/>
+          </a:p>
+          <a:p>
+            <a:pPr marL="177800" indent="-177800">
+              <a:spcAft>
+                <a:spcPts val="800"/>
+              </a:spcAft>
+              <a:buSzPct val="100000"/>
+              <a:buChar char="•"/>
+            </a:pPr>
+            <a:r>
+              <a:rPr lang="en-US" sz="950" dirty="0">
+                <a:solidFill>
+                  <a:srgbClr val="2E2E38"/>
+                </a:solidFill>
+                <a:latin typeface="Calibri" pitchFamily="34" charset="0"/>
+                <a:ea typeface="Calibri" pitchFamily="34" charset="-122"/>
+                <a:cs typeface="Calibri" pitchFamily="34" charset="-120"/>
+              </a:rPr>
+              <a:t>Retire DB2 to Oracle Exadata</a:t>
+            </a:r>
+            <a:endParaRPr lang="en-US" sz="950" dirty="0"/>
+          </a:p>
+        </p:txBody>
+      </p:sp>
+      <p:sp>
+        <p:nvSpPr>
+          <p:cNvPr id="18" name="Shape 16"/>
+          <p:cNvSpPr/>
+          <p:nvPr/>
+        </p:nvSpPr>
+        <p:spPr>
+          <a:xfrm>
+            <a:off x="457200" y="3182112"/>
+            <a:ext cx="5120640" cy="1033272"/>
+          </a:xfrm>
+          <a:prstGeom prst="roundRect">
+            <a:avLst>
+              <a:gd name="adj" fmla="val 5310"/>
+            </a:avLst>
+          </a:prstGeom>
+          <a:solidFill>
+            <a:srgbClr val="F2F2F2"/>
+          </a:solidFill>
+          <a:ln/>
+          <a:effectLst>
+            <a:outerShdw blurRad="50800" dist="25400" dir="5400000" algn="bl" rotWithShape="0">
+              <a:srgbClr val="808080">
+                <a:alpha val="20000"/>
+              </a:srgbClr>
+            </a:outerShdw>
+          </a:effectLst>
+        </p:spPr>
+      </p:sp>
+      <p:sp>
+        <p:nvSpPr>
+          <p:cNvPr id="19" name="Shape 17"/>
+          <p:cNvSpPr/>
+          <p:nvPr/>
+        </p:nvSpPr>
+        <p:spPr>
+          <a:xfrm>
+            <a:off x="594360" y="3310128"/>
+            <a:ext cx="384048" cy="384048"/>
+          </a:xfrm>
+          <a:prstGeom prst="ellipse">
+            <a:avLst/>
+          </a:prstGeom>
+          <a:solidFill>
+            <a:srgbClr val="2E2E38"/>
+          </a:solidFill>
+          <a:ln/>
+        </p:spPr>
+      </p:sp>
+      <p:sp>
+        <p:nvSpPr>
+          <p:cNvPr id="20" name="Text 18"/>
+          <p:cNvSpPr/>
+          <p:nvPr/>
+        </p:nvSpPr>
+        <p:spPr>
+          <a:xfrm>
+            <a:off x="594360" y="3310128"/>
+            <a:ext cx="384048" cy="384048"/>
+          </a:xfrm>
+          <a:prstGeom prst="rect">
+            <a:avLst/>
+          </a:prstGeom>
+          <a:noFill/>
+          <a:ln/>
+        </p:spPr>
+        <p:txBody>
+          <a:bodyPr wrap="square" rtlCol="0" anchor="ctr"/>
+          <a:lstStyle/>
+          <a:p>
+            <a:pPr marL="0" indent="0" algn="ctr">
+              <a:buNone/>
+            </a:pPr>
+            <a:r>
+              <a:rPr lang="en-US" sz="1200" b="1" dirty="0">
+                <a:solidFill>
+                  <a:srgbClr val="FFFFFF"/>
+                </a:solidFill>
+                <a:latin typeface="Calibri" pitchFamily="34" charset="0"/>
+                <a:ea typeface="Calibri" pitchFamily="34" charset="-122"/>
+                <a:cs typeface="Calibri" pitchFamily="34" charset="-120"/>
+              </a:rPr>
+              <a:t>M</a:t>
+            </a:r>
+            <a:endParaRPr lang="en-US" sz="1200" dirty="0"/>
+          </a:p>
+        </p:txBody>
+      </p:sp>
+      <p:sp>
+        <p:nvSpPr>
+          <p:cNvPr id="21" name="Text 19"/>
+          <p:cNvSpPr/>
+          <p:nvPr/>
+        </p:nvSpPr>
+        <p:spPr>
+          <a:xfrm>
+            <a:off x="1078992" y="3255264"/>
+            <a:ext cx="4343400" cy="292608"/>
           </a:xfrm>
           <a:prstGeom prst="rect">
             <a:avLst/>
@@ -38886,7 +39204,7 @@
               <a:buNone/>
             </a:pPr>
             <a:r>
-              <a:rPr lang="en-US" sz="1100" dirty="0">
+              <a:rPr lang="en-US" sz="1200" b="1" dirty="0">
                 <a:solidFill>
                   <a:srgbClr val="2E2E38"/>
                 </a:solidFill>
@@ -38894,26 +39212,252 @@
                 <a:ea typeface="Calibri" pitchFamily="34" charset="-122"/>
                 <a:cs typeface="Calibri" pitchFamily="34" charset="-120"/>
               </a:rPr>
-              <a:t>ARC-approved Intake #290, ~$3.2M documented budget, 42 applications in scope. CONFIRMED (Aug 2026): Cloud@Customer → Exa@Azure workload migration targeted Q3 2026; Exa@Azure becomes the sole Oracle landing zone going forward.</a:t>
+              <a:t>Modernization &amp; AI-Readiness</a:t>
             </a:r>
-            <a:endParaRPr lang="en-US" sz="1100" dirty="0"/>
+            <a:endParaRPr lang="en-US" sz="1200" dirty="0"/>
           </a:p>
         </p:txBody>
       </p:sp>
       <p:sp>
         <p:nvSpPr>
-          <p:cNvPr id="13" name="Shape 11"/>
-          <p:cNvSpPr/>
-          <p:nvPr/>
-        </p:nvSpPr>
-        <p:spPr>
-          <a:xfrm>
-            <a:off x="457200" y="2606040"/>
-            <a:ext cx="5440680" cy="1170432"/>
+          <p:cNvPr id="22" name="Text 20"/>
+          <p:cNvSpPr/>
+          <p:nvPr/>
+        </p:nvSpPr>
+        <p:spPr>
+          <a:xfrm>
+            <a:off x="1078992" y="3566160"/>
+            <a:ext cx="4343400" cy="594360"/>
+          </a:xfrm>
+          <a:prstGeom prst="rect">
+            <a:avLst/>
+          </a:prstGeom>
+          <a:noFill/>
+          <a:ln/>
+        </p:spPr>
+        <p:txBody>
+          <a:bodyPr wrap="square" rtlCol="0" anchor="t"/>
+          <a:lstStyle/>
+          <a:p>
+            <a:pPr marL="177800" indent="-177800">
+              <a:spcAft>
+                <a:spcPts val="800"/>
+              </a:spcAft>
+              <a:buSzPct val="100000"/>
+              <a:buChar char="•"/>
+            </a:pPr>
+            <a:r>
+              <a:rPr lang="en-US" sz="950" dirty="0">
+                <a:solidFill>
+                  <a:srgbClr val="2E2E38"/>
+                </a:solidFill>
+                <a:latin typeface="Calibri" pitchFamily="34" charset="0"/>
+                <a:ea typeface="Calibri" pitchFamily="34" charset="-122"/>
+                <a:cs typeface="Calibri" pitchFamily="34" charset="-120"/>
+              </a:rPr>
+              <a:t>Migrate Oracle 19c → 26ai with Autonomous ops</a:t>
+            </a:r>
+            <a:endParaRPr lang="en-US" sz="950" dirty="0"/>
+          </a:p>
+          <a:p>
+            <a:pPr marL="177800" indent="-177800">
+              <a:spcAft>
+                <a:spcPts val="800"/>
+              </a:spcAft>
+              <a:buSzPct val="100000"/>
+              <a:buChar char="•"/>
+            </a:pPr>
+            <a:r>
+              <a:rPr lang="en-US" sz="950" dirty="0">
+                <a:solidFill>
+                  <a:srgbClr val="2E2E38"/>
+                </a:solidFill>
+                <a:latin typeface="Calibri" pitchFamily="34" charset="0"/>
+                <a:ea typeface="Calibri" pitchFamily="34" charset="-122"/>
+                <a:cs typeface="Calibri" pitchFamily="34" charset="-120"/>
+              </a:rPr>
+              <a:t>One placement policy for NoSQL / Postgres / graph-vector</a:t>
+            </a:r>
+            <a:endParaRPr lang="en-US" sz="950" dirty="0"/>
+          </a:p>
+        </p:txBody>
+      </p:sp>
+      <p:sp>
+        <p:nvSpPr>
+          <p:cNvPr id="23" name="Shape 21"/>
+          <p:cNvSpPr/>
+          <p:nvPr/>
+        </p:nvSpPr>
+        <p:spPr>
+          <a:xfrm>
+            <a:off x="594360" y="4343400"/>
+            <a:ext cx="384048" cy="384048"/>
+          </a:xfrm>
+          <a:prstGeom prst="ellipse">
+            <a:avLst/>
+          </a:prstGeom>
+          <a:solidFill>
+            <a:srgbClr val="BA0C2F"/>
+          </a:solidFill>
+          <a:ln/>
+        </p:spPr>
+      </p:sp>
+      <p:sp>
+        <p:nvSpPr>
+          <p:cNvPr id="24" name="Text 22"/>
+          <p:cNvSpPr/>
+          <p:nvPr/>
+        </p:nvSpPr>
+        <p:spPr>
+          <a:xfrm>
+            <a:off x="594360" y="4343400"/>
+            <a:ext cx="384048" cy="384048"/>
+          </a:xfrm>
+          <a:prstGeom prst="rect">
+            <a:avLst/>
+          </a:prstGeom>
+          <a:noFill/>
+          <a:ln/>
+        </p:spPr>
+        <p:txBody>
+          <a:bodyPr wrap="square" rtlCol="0" anchor="ctr"/>
+          <a:lstStyle/>
+          <a:p>
+            <a:pPr marL="0" indent="0" algn="ctr">
+              <a:buNone/>
+            </a:pPr>
+            <a:r>
+              <a:rPr lang="en-US" sz="1200" b="1" dirty="0">
+                <a:solidFill>
+                  <a:srgbClr val="FFFFFF"/>
+                </a:solidFill>
+                <a:latin typeface="Calibri" pitchFamily="34" charset="0"/>
+                <a:ea typeface="Calibri" pitchFamily="34" charset="-122"/>
+                <a:cs typeface="Calibri" pitchFamily="34" charset="-120"/>
+              </a:rPr>
+              <a:t>R</a:t>
+            </a:r>
+            <a:endParaRPr lang="en-US" sz="1200" dirty="0"/>
+          </a:p>
+        </p:txBody>
+      </p:sp>
+      <p:sp>
+        <p:nvSpPr>
+          <p:cNvPr id="25" name="Text 23"/>
+          <p:cNvSpPr/>
+          <p:nvPr/>
+        </p:nvSpPr>
+        <p:spPr>
+          <a:xfrm>
+            <a:off x="1078992" y="4288536"/>
+            <a:ext cx="4343400" cy="292608"/>
+          </a:xfrm>
+          <a:prstGeom prst="rect">
+            <a:avLst/>
+          </a:prstGeom>
+          <a:noFill/>
+          <a:ln/>
+        </p:spPr>
+        <p:txBody>
+          <a:bodyPr wrap="square" rtlCol="0" anchor="ctr"/>
+          <a:lstStyle/>
+          <a:p>
+            <a:pPr marL="0" indent="0">
+              <a:buNone/>
+            </a:pPr>
+            <a:r>
+              <a:rPr lang="en-US" sz="1200" b="1" dirty="0">
+                <a:solidFill>
+                  <a:srgbClr val="2E2E38"/>
+                </a:solidFill>
+                <a:latin typeface="Calibri" pitchFamily="34" charset="0"/>
+                <a:ea typeface="Calibri" pitchFamily="34" charset="-122"/>
+                <a:cs typeface="Calibri" pitchFamily="34" charset="-120"/>
+              </a:rPr>
+              <a:t>Resilience &amp; DR Modernization</a:t>
+            </a:r>
+            <a:endParaRPr lang="en-US" sz="1200" dirty="0"/>
+          </a:p>
+        </p:txBody>
+      </p:sp>
+      <p:sp>
+        <p:nvSpPr>
+          <p:cNvPr id="26" name="Text 24"/>
+          <p:cNvSpPr/>
+          <p:nvPr/>
+        </p:nvSpPr>
+        <p:spPr>
+          <a:xfrm>
+            <a:off x="1078992" y="4599432"/>
+            <a:ext cx="4343400" cy="594360"/>
+          </a:xfrm>
+          <a:prstGeom prst="rect">
+            <a:avLst/>
+          </a:prstGeom>
+          <a:noFill/>
+          <a:ln/>
+        </p:spPr>
+        <p:txBody>
+          <a:bodyPr wrap="square" rtlCol="0" anchor="t"/>
+          <a:lstStyle/>
+          <a:p>
+            <a:pPr marL="177800" indent="-177800">
+              <a:spcAft>
+                <a:spcPts val="800"/>
+              </a:spcAft>
+              <a:buSzPct val="100000"/>
+              <a:buChar char="•"/>
+            </a:pPr>
+            <a:r>
+              <a:rPr lang="en-US" sz="950" dirty="0">
+                <a:solidFill>
+                  <a:srgbClr val="2E2E38"/>
+                </a:solidFill>
+                <a:latin typeface="Calibri" pitchFamily="34" charset="0"/>
+                <a:ea typeface="Calibri" pitchFamily="34" charset="-122"/>
+                <a:cs typeface="Calibri" pitchFamily="34" charset="-120"/>
+              </a:rPr>
+              <a:t>Extend Exa@Azure tiered SLA + multi-region model</a:t>
+            </a:r>
+            <a:endParaRPr lang="en-US" sz="950" dirty="0"/>
+          </a:p>
+          <a:p>
+            <a:pPr marL="177800" indent="-177800">
+              <a:spcAft>
+                <a:spcPts val="800"/>
+              </a:spcAft>
+              <a:buSzPct val="100000"/>
+              <a:buChar char="•"/>
+            </a:pPr>
+            <a:r>
+              <a:rPr lang="en-US" sz="950" dirty="0">
+                <a:solidFill>
+                  <a:srgbClr val="2E2E38"/>
+                </a:solidFill>
+                <a:latin typeface="Calibri" pitchFamily="34" charset="0"/>
+                <a:ea typeface="Calibri" pitchFamily="34" charset="-122"/>
+                <a:cs typeface="Calibri" pitchFamily="34" charset="-120"/>
+              </a:rPr>
+              <a:t>Bring the wider estate to parity</a:t>
+            </a:r>
+            <a:endParaRPr lang="en-US" sz="950" dirty="0"/>
+          </a:p>
+        </p:txBody>
+      </p:sp>
+      <p:sp>
+        <p:nvSpPr>
+          <p:cNvPr id="27" name="Shape 25"/>
+          <p:cNvSpPr/>
+          <p:nvPr/>
+        </p:nvSpPr>
+        <p:spPr>
+          <a:xfrm>
+            <a:off x="457200" y="5248656"/>
+            <a:ext cx="5120640" cy="1033272"/>
           </a:xfrm>
           <a:prstGeom prst="roundRect">
             <a:avLst>
-              <a:gd name="adj" fmla="val 4688"/>
+              <a:gd name="adj" fmla="val 5310"/>
             </a:avLst>
           </a:prstGeom>
           <a:solidFill>
@@ -38931,14 +39475,176 @@
       </p:sp>
       <p:sp>
         <p:nvSpPr>
-          <p:cNvPr id="14" name="Shape 12"/>
-          <p:cNvSpPr/>
-          <p:nvPr/>
-        </p:nvSpPr>
-        <p:spPr>
-          <a:xfrm>
-            <a:off x="621792" y="2752344"/>
-            <a:ext cx="365760" cy="365760"/>
+          <p:cNvPr id="28" name="Shape 26"/>
+          <p:cNvSpPr/>
+          <p:nvPr/>
+        </p:nvSpPr>
+        <p:spPr>
+          <a:xfrm>
+            <a:off x="594360" y="5376672"/>
+            <a:ext cx="384048" cy="384048"/>
+          </a:xfrm>
+          <a:prstGeom prst="ellipse">
+            <a:avLst/>
+          </a:prstGeom>
+          <a:solidFill>
+            <a:srgbClr val="2E2E38"/>
+          </a:solidFill>
+          <a:ln/>
+        </p:spPr>
+      </p:sp>
+      <p:sp>
+        <p:nvSpPr>
+          <p:cNvPr id="29" name="Text 27"/>
+          <p:cNvSpPr/>
+          <p:nvPr/>
+        </p:nvSpPr>
+        <p:spPr>
+          <a:xfrm>
+            <a:off x="594360" y="5376672"/>
+            <a:ext cx="384048" cy="384048"/>
+          </a:xfrm>
+          <a:prstGeom prst="rect">
+            <a:avLst/>
+          </a:prstGeom>
+          <a:noFill/>
+          <a:ln/>
+        </p:spPr>
+        <p:txBody>
+          <a:bodyPr wrap="square" rtlCol="0" anchor="ctr"/>
+          <a:lstStyle/>
+          <a:p>
+            <a:pPr marL="0" indent="0" algn="ctr">
+              <a:buNone/>
+            </a:pPr>
+            <a:r>
+              <a:rPr lang="en-US" sz="1200" b="1" dirty="0">
+                <a:solidFill>
+                  <a:srgbClr val="FFFFFF"/>
+                </a:solidFill>
+                <a:latin typeface="Calibri" pitchFamily="34" charset="0"/>
+                <a:ea typeface="Calibri" pitchFamily="34" charset="-122"/>
+                <a:cs typeface="Calibri" pitchFamily="34" charset="-120"/>
+              </a:rPr>
+              <a:t>O</a:t>
+            </a:r>
+            <a:endParaRPr lang="en-US" sz="1200" dirty="0"/>
+          </a:p>
+        </p:txBody>
+      </p:sp>
+      <p:sp>
+        <p:nvSpPr>
+          <p:cNvPr id="30" name="Text 28"/>
+          <p:cNvSpPr/>
+          <p:nvPr/>
+        </p:nvSpPr>
+        <p:spPr>
+          <a:xfrm>
+            <a:off x="1078992" y="5321808"/>
+            <a:ext cx="4343400" cy="292608"/>
+          </a:xfrm>
+          <a:prstGeom prst="rect">
+            <a:avLst/>
+          </a:prstGeom>
+          <a:noFill/>
+          <a:ln/>
+        </p:spPr>
+        <p:txBody>
+          <a:bodyPr wrap="square" rtlCol="0" anchor="ctr"/>
+          <a:lstStyle/>
+          <a:p>
+            <a:pPr marL="0" indent="0">
+              <a:buNone/>
+            </a:pPr>
+            <a:r>
+              <a:rPr lang="en-US" sz="1200" b="1" dirty="0">
+                <a:solidFill>
+                  <a:srgbClr val="2E2E38"/>
+                </a:solidFill>
+                <a:latin typeface="Calibri" pitchFamily="34" charset="0"/>
+                <a:ea typeface="Calibri" pitchFamily="34" charset="-122"/>
+                <a:cs typeface="Calibri" pitchFamily="34" charset="-120"/>
+              </a:rPr>
+              <a:t>Operating Model Evolution</a:t>
+            </a:r>
+            <a:endParaRPr lang="en-US" sz="1200" dirty="0"/>
+          </a:p>
+        </p:txBody>
+      </p:sp>
+      <p:sp>
+        <p:nvSpPr>
+          <p:cNvPr id="31" name="Text 29"/>
+          <p:cNvSpPr/>
+          <p:nvPr/>
+        </p:nvSpPr>
+        <p:spPr>
+          <a:xfrm>
+            <a:off x="1078992" y="5632704"/>
+            <a:ext cx="4343400" cy="594360"/>
+          </a:xfrm>
+          <a:prstGeom prst="rect">
+            <a:avLst/>
+          </a:prstGeom>
+          <a:noFill/>
+          <a:ln/>
+        </p:spPr>
+        <p:txBody>
+          <a:bodyPr wrap="square" rtlCol="0" anchor="t"/>
+          <a:lstStyle/>
+          <a:p>
+            <a:pPr marL="177800" indent="-177800">
+              <a:spcAft>
+                <a:spcPts val="800"/>
+              </a:spcAft>
+              <a:buSzPct val="100000"/>
+              <a:buChar char="•"/>
+            </a:pPr>
+            <a:r>
+              <a:rPr lang="en-US" sz="950" dirty="0">
+                <a:solidFill>
+                  <a:srgbClr val="2E2E38"/>
+                </a:solidFill>
+                <a:latin typeface="Calibri" pitchFamily="34" charset="0"/>
+                <a:ea typeface="Calibri" pitchFamily="34" charset="-122"/>
+                <a:cs typeface="Calibri" pitchFamily="34" charset="-120"/>
+              </a:rPr>
+              <a:t>Shift HCL ticket-driven model toward self-service</a:t>
+            </a:r>
+            <a:endParaRPr lang="en-US" sz="950" dirty="0"/>
+          </a:p>
+          <a:p>
+            <a:pPr marL="177800" indent="-177800">
+              <a:spcAft>
+                <a:spcPts val="800"/>
+              </a:spcAft>
+              <a:buSzPct val="100000"/>
+              <a:buChar char="•"/>
+            </a:pPr>
+            <a:r>
+              <a:rPr lang="en-US" sz="950" dirty="0">
+                <a:solidFill>
+                  <a:srgbClr val="2E2E38"/>
+                </a:solidFill>
+                <a:latin typeface="Calibri" pitchFamily="34" charset="0"/>
+                <a:ea typeface="Calibri" pitchFamily="34" charset="-122"/>
+                <a:cs typeface="Calibri" pitchFamily="34" charset="-120"/>
+              </a:rPr>
+              <a:t>Lower priority — low technical debt today</a:t>
+            </a:r>
+            <a:endParaRPr lang="en-US" sz="950" dirty="0"/>
+          </a:p>
+        </p:txBody>
+      </p:sp>
+      <p:sp>
+        <p:nvSpPr>
+          <p:cNvPr id="32" name="Shape 30"/>
+          <p:cNvSpPr/>
+          <p:nvPr/>
+        </p:nvSpPr>
+        <p:spPr>
+          <a:xfrm>
+            <a:off x="6748272" y="2276856"/>
+            <a:ext cx="384048" cy="384048"/>
           </a:xfrm>
           <a:prstGeom prst="ellipse">
             <a:avLst/>
@@ -38951,14 +39657,14 @@
       </p:sp>
       <p:sp>
         <p:nvSpPr>
-          <p:cNvPr id="15" name="Text 13"/>
-          <p:cNvSpPr/>
-          <p:nvPr/>
-        </p:nvSpPr>
-        <p:spPr>
-          <a:xfrm>
-            <a:off x="621792" y="2752344"/>
-            <a:ext cx="365760" cy="365760"/>
+          <p:cNvPr id="33" name="Text 31"/>
+          <p:cNvSpPr/>
+          <p:nvPr/>
+        </p:nvSpPr>
+        <p:spPr>
+          <a:xfrm>
+            <a:off x="6748272" y="2276856"/>
+            <a:ext cx="384048" cy="384048"/>
           </a:xfrm>
           <a:prstGeom prst="rect">
             <a:avLst/>
@@ -38990,14 +39696,14 @@
       </p:sp>
       <p:sp>
         <p:nvSpPr>
-          <p:cNvPr id="16" name="Text 14"/>
-          <p:cNvSpPr/>
-          <p:nvPr/>
-        </p:nvSpPr>
-        <p:spPr>
-          <a:xfrm>
-            <a:off x="1078992" y="2697480"/>
-            <a:ext cx="4654296" cy="457200"/>
+          <p:cNvPr id="34" name="Text 32"/>
+          <p:cNvSpPr/>
+          <p:nvPr/>
+        </p:nvSpPr>
+        <p:spPr>
+          <a:xfrm>
+            <a:off x="7232904" y="2221992"/>
+            <a:ext cx="4343400" cy="292608"/>
           </a:xfrm>
           <a:prstGeom prst="rect">
             <a:avLst/>
@@ -39013,46 +39719,7 @@
               <a:buNone/>
             </a:pPr>
             <a:r>
-              <a:rPr lang="en-US" sz="1100" b="1" dirty="0">
-                <a:solidFill>
-                  <a:srgbClr val="8C0924"/>
-                </a:solidFill>
-                <a:latin typeface="Calibri" pitchFamily="34" charset="0"/>
-                <a:ea typeface="Calibri" pitchFamily="34" charset="-122"/>
-                <a:cs typeface="Calibri" pitchFamily="34" charset="-120"/>
-              </a:rPr>
-              <a:t>MS SQL Platform Standardization — CONFIRMED</a:t>
-            </a:r>
-            <a:endParaRPr lang="en-US" sz="1100" dirty="0"/>
-          </a:p>
-        </p:txBody>
-      </p:sp>
-      <p:sp>
-        <p:nvSpPr>
-          <p:cNvPr id="17" name="Text 15"/>
-          <p:cNvSpPr/>
-          <p:nvPr/>
-        </p:nvSpPr>
-        <p:spPr>
-          <a:xfrm>
-            <a:off x="621792" y="3136392"/>
-            <a:ext cx="5111496" cy="594360"/>
-          </a:xfrm>
-          <a:prstGeom prst="rect">
-            <a:avLst/>
-          </a:prstGeom>
-          <a:noFill/>
-          <a:ln/>
-        </p:spPr>
-        <p:txBody>
-          <a:bodyPr wrap="square" rtlCol="0" anchor="ctr"/>
-          <a:lstStyle/>
-          <a:p>
-            <a:pPr marL="0" indent="0">
-              <a:buNone/>
-            </a:pPr>
-            <a:r>
-              <a:rPr lang="en-US" sz="800" b="1" dirty="0">
+              <a:rPr lang="en-US" sz="1200" b="1" dirty="0">
                 <a:solidFill>
                   <a:srgbClr val="2E2E38"/>
                 </a:solidFill>
@@ -39060,10 +39727,49 @@
                 <a:ea typeface="Calibri" pitchFamily="34" charset="-122"/>
                 <a:cs typeface="Calibri" pitchFamily="34" charset="-120"/>
               </a:rPr>
-              <a:t>Opportunity: </a:t>
+              <a:t>Standardize &amp; Consolidate the Estate</a:t>
+            </a:r>
+            <a:endParaRPr lang="en-US" sz="1200" dirty="0"/>
+          </a:p>
+        </p:txBody>
+      </p:sp>
+      <p:sp>
+        <p:nvSpPr>
+          <p:cNvPr id="35" name="Text 33"/>
+          <p:cNvSpPr/>
+          <p:nvPr/>
+        </p:nvSpPr>
+        <p:spPr>
+          <a:xfrm>
+            <a:off x="7232904" y="2551176"/>
+            <a:ext cx="4343400" cy="548640"/>
+          </a:xfrm>
+          <a:prstGeom prst="rect">
+            <a:avLst/>
+          </a:prstGeom>
+          <a:noFill/>
+          <a:ln/>
+        </p:spPr>
+        <p:txBody>
+          <a:bodyPr wrap="square" rtlCol="0" anchor="t"/>
+          <a:lstStyle/>
+          <a:p>
+            <a:pPr marL="0" indent="0">
+              <a:buNone/>
+            </a:pPr>
+            <a:r>
+              <a:rPr lang="en-US" sz="950" b="1" dirty="0">
+                <a:solidFill>
+                  <a:srgbClr val="BA0C2F"/>
+                </a:solidFill>
+                <a:latin typeface="Calibri" pitchFamily="34" charset="0"/>
+                <a:ea typeface="Calibri" pitchFamily="34" charset="-122"/>
+                <a:cs typeface="Calibri" pitchFamily="34" charset="-120"/>
+              </a:rPr>
+              <a:t>✓ </a:t>
             </a:r>
             <a:r>
-              <a:rPr lang="en-US" sz="800" dirty="0">
+              <a:rPr lang="en-US" sz="950" dirty="0">
                 <a:solidFill>
                   <a:srgbClr val="2E2E38"/>
                 </a:solidFill>
@@ -39071,52 +39777,30 @@
                 <a:ea typeface="Calibri" pitchFamily="34" charset="-122"/>
                 <a:cs typeface="Calibri" pitchFamily="34" charset="-120"/>
               </a:rPr>
-              <a:t>Eliminate on-prem "IaaS" MS SQL in both clouds; standardize on Azure SQL Managed Instance / AWS RDS. Confirmed platform for small–medium, lower-transaction workloads. </a:t>
+              <a:t>Fewer patterns to operate; removes the clearest cost outlier (~10x MS SQL rate)</a:t>
             </a:r>
-            <a:r>
-              <a:rPr lang="en-US" sz="800" b="1" dirty="0">
-                <a:solidFill>
-                  <a:srgbClr val="2E2E38"/>
-                </a:solidFill>
-                <a:latin typeface="Calibri" pitchFamily="34" charset="0"/>
-                <a:ea typeface="Calibri" pitchFamily="34" charset="-122"/>
-                <a:cs typeface="Calibri" pitchFamily="34" charset="-120"/>
-              </a:rPr>
-              <a:t>Value: </a:t>
-            </a:r>
-            <a:r>
-              <a:rPr lang="en-US" sz="800" dirty="0">
-                <a:solidFill>
-                  <a:srgbClr val="2E2E38"/>
-                </a:solidFill>
-                <a:latin typeface="Calibri" pitchFamily="34" charset="0"/>
-                <a:ea typeface="Calibri" pitchFamily="34" charset="-122"/>
-                <a:cs typeface="Calibri" pitchFamily="34" charset="-120"/>
-              </a:rPr>
-              <a:t>Fewer patterns to operate and secure; consistent footprint in both clouds.</a:t>
-            </a:r>
-            <a:endParaRPr lang="en-US" sz="800" dirty="0"/>
+            <a:endParaRPr lang="en-US" sz="950" dirty="0"/>
           </a:p>
         </p:txBody>
       </p:sp>
       <p:sp>
         <p:nvSpPr>
-          <p:cNvPr id="18" name="Shape 16"/>
-          <p:cNvSpPr/>
-          <p:nvPr/>
-        </p:nvSpPr>
-        <p:spPr>
-          <a:xfrm>
-            <a:off x="6080760" y="2606040"/>
-            <a:ext cx="5440680" cy="1170432"/>
+          <p:cNvPr id="36" name="Shape 34"/>
+          <p:cNvSpPr/>
+          <p:nvPr/>
+        </p:nvSpPr>
+        <p:spPr>
+          <a:xfrm>
+            <a:off x="6611112" y="3182112"/>
+            <a:ext cx="5120640" cy="1033272"/>
           </a:xfrm>
           <a:prstGeom prst="roundRect">
             <a:avLst>
-              <a:gd name="adj" fmla="val 4688"/>
+              <a:gd name="adj" fmla="val 5310"/>
             </a:avLst>
           </a:prstGeom>
           <a:solidFill>
-            <a:srgbClr val="F0CCD2"/>
+            <a:srgbClr val="F2F2F2"/>
           </a:solidFill>
           <a:ln/>
           <a:effectLst>
@@ -39130,14 +39814,14 @@
       </p:sp>
       <p:sp>
         <p:nvSpPr>
-          <p:cNvPr id="19" name="Shape 17"/>
-          <p:cNvSpPr/>
-          <p:nvPr/>
-        </p:nvSpPr>
-        <p:spPr>
-          <a:xfrm>
-            <a:off x="6245352" y="2752344"/>
-            <a:ext cx="365760" cy="365760"/>
+          <p:cNvPr id="37" name="Shape 35"/>
+          <p:cNvSpPr/>
+          <p:nvPr/>
+        </p:nvSpPr>
+        <p:spPr>
+          <a:xfrm>
+            <a:off x="6748272" y="3310128"/>
+            <a:ext cx="384048" cy="384048"/>
           </a:xfrm>
           <a:prstGeom prst="ellipse">
             <a:avLst/>
@@ -39150,14 +39834,14 @@
       </p:sp>
       <p:sp>
         <p:nvSpPr>
-          <p:cNvPr id="20" name="Text 18"/>
-          <p:cNvSpPr/>
-          <p:nvPr/>
-        </p:nvSpPr>
-        <p:spPr>
-          <a:xfrm>
-            <a:off x="6245352" y="2752344"/>
-            <a:ext cx="365760" cy="365760"/>
+          <p:cNvPr id="38" name="Text 36"/>
+          <p:cNvSpPr/>
+          <p:nvPr/>
+        </p:nvSpPr>
+        <p:spPr>
+          <a:xfrm>
+            <a:off x="6748272" y="3310128"/>
+            <a:ext cx="384048" cy="384048"/>
           </a:xfrm>
           <a:prstGeom prst="rect">
             <a:avLst/>
@@ -39189,14 +39873,14 @@
       </p:sp>
       <p:sp>
         <p:nvSpPr>
-          <p:cNvPr id="21" name="Text 19"/>
-          <p:cNvSpPr/>
-          <p:nvPr/>
-        </p:nvSpPr>
-        <p:spPr>
-          <a:xfrm>
-            <a:off x="6702552" y="2697480"/>
-            <a:ext cx="4654296" cy="457200"/>
+          <p:cNvPr id="39" name="Text 37"/>
+          <p:cNvSpPr/>
+          <p:nvPr/>
+        </p:nvSpPr>
+        <p:spPr>
+          <a:xfrm>
+            <a:off x="7232904" y="3255264"/>
+            <a:ext cx="4343400" cy="292608"/>
           </a:xfrm>
           <a:prstGeom prst="rect">
             <a:avLst/>
@@ -39212,46 +39896,7 @@
               <a:buNone/>
             </a:pPr>
             <a:r>
-              <a:rPr lang="en-US" sz="1100" b="1" dirty="0">
-                <a:solidFill>
-                  <a:srgbClr val="8C0924"/>
-                </a:solidFill>
-                <a:latin typeface="Calibri" pitchFamily="34" charset="0"/>
-                <a:ea typeface="Calibri" pitchFamily="34" charset="-122"/>
-                <a:cs typeface="Calibri" pitchFamily="34" charset="-120"/>
-              </a:rPr>
-              <a:t>DB2 Retirement to Oracle Exadata — pain point</a:t>
-            </a:r>
-            <a:endParaRPr lang="en-US" sz="1100" dirty="0"/>
-          </a:p>
-        </p:txBody>
-      </p:sp>
-      <p:sp>
-        <p:nvSpPr>
-          <p:cNvPr id="22" name="Text 20"/>
-          <p:cNvSpPr/>
-          <p:nvPr/>
-        </p:nvSpPr>
-        <p:spPr>
-          <a:xfrm>
-            <a:off x="6245352" y="3136392"/>
-            <a:ext cx="5111496" cy="594360"/>
-          </a:xfrm>
-          <a:prstGeom prst="rect">
-            <a:avLst/>
-          </a:prstGeom>
-          <a:noFill/>
-          <a:ln/>
-        </p:spPr>
-        <p:txBody>
-          <a:bodyPr wrap="square" rtlCol="0" anchor="ctr"/>
-          <a:lstStyle/>
-          <a:p>
-            <a:pPr marL="0" indent="0">
-              <a:buNone/>
-            </a:pPr>
-            <a:r>
-              <a:rPr lang="en-US" sz="800" b="1" dirty="0">
+              <a:rPr lang="en-US" sz="1200" b="1" dirty="0">
                 <a:solidFill>
                   <a:srgbClr val="2E2E38"/>
                 </a:solidFill>
@@ -39259,10 +39904,49 @@
                 <a:ea typeface="Calibri" pitchFamily="34" charset="-122"/>
                 <a:cs typeface="Calibri" pitchFamily="34" charset="-120"/>
               </a:rPr>
-              <a:t>Opportunity: </a:t>
+              <a:t>Modernize for AI-Readiness</a:t>
+            </a:r>
+            <a:endParaRPr lang="en-US" sz="1200" dirty="0"/>
+          </a:p>
+        </p:txBody>
+      </p:sp>
+      <p:sp>
+        <p:nvSpPr>
+          <p:cNvPr id="40" name="Text 38"/>
+          <p:cNvSpPr/>
+          <p:nvPr/>
+        </p:nvSpPr>
+        <p:spPr>
+          <a:xfrm>
+            <a:off x="7232904" y="3584448"/>
+            <a:ext cx="4343400" cy="548640"/>
+          </a:xfrm>
+          <a:prstGeom prst="rect">
+            <a:avLst/>
+          </a:prstGeom>
+          <a:noFill/>
+          <a:ln/>
+        </p:spPr>
+        <p:txBody>
+          <a:bodyPr wrap="square" rtlCol="0" anchor="t"/>
+          <a:lstStyle/>
+          <a:p>
+            <a:pPr marL="0" indent="0">
+              <a:buNone/>
+            </a:pPr>
+            <a:r>
+              <a:rPr lang="en-US" sz="950" b="1" dirty="0">
+                <a:solidFill>
+                  <a:srgbClr val="BA0C2F"/>
+                </a:solidFill>
+                <a:latin typeface="Calibri" pitchFamily="34" charset="0"/>
+                <a:ea typeface="Calibri" pitchFamily="34" charset="-122"/>
+                <a:cs typeface="Calibri" pitchFamily="34" charset="-120"/>
+              </a:rPr>
+              <a:t>✓ </a:t>
             </a:r>
             <a:r>
-              <a:rPr lang="en-US" sz="800" dirty="0">
+              <a:rPr lang="en-US" sz="950" dirty="0">
                 <a:solidFill>
                   <a:srgbClr val="2E2E38"/>
                 </a:solidFill>
@@ -39270,73 +39954,22 @@
                 <a:ea typeface="Calibri" pitchFamily="34" charset="-122"/>
                 <a:cs typeface="Calibri" pitchFamily="34" charset="-120"/>
               </a:rPr>
-              <a:t>DB2 in containment ~10 years; Oracle Exadata is now the confirmed replacement target. The one item still framed as risk, not opportunity. </a:t>
+              <a:t>AI-ready platform without a separate NoSQL buildout; lower ops burden</a:t>
             </a:r>
-            <a:r>
-              <a:rPr lang="en-US" sz="800" b="1" dirty="0">
-                <a:solidFill>
-                  <a:srgbClr val="2E2E38"/>
-                </a:solidFill>
-                <a:latin typeface="Calibri" pitchFamily="34" charset="0"/>
-                <a:ea typeface="Calibri" pitchFamily="34" charset="-122"/>
-                <a:cs typeface="Calibri" pitchFamily="34" charset="-120"/>
-              </a:rPr>
-              <a:t>Value: </a:t>
-            </a:r>
-            <a:r>
-              <a:rPr lang="en-US" sz="800" dirty="0">
-                <a:solidFill>
-                  <a:srgbClr val="2E2E38"/>
-                </a:solidFill>
-                <a:latin typeface="Calibri" pitchFamily="34" charset="0"/>
-                <a:ea typeface="Calibri" pitchFamily="34" charset="-122"/>
-                <a:cs typeface="Calibri" pitchFamily="34" charset="-120"/>
-              </a:rPr>
-              <a:t>Removes the estate's clearest cost outlier (~10x MS SQL rate).</a:t>
-            </a:r>
-            <a:endParaRPr lang="en-US" sz="800" dirty="0"/>
+            <a:endParaRPr lang="en-US" sz="950" dirty="0"/>
           </a:p>
         </p:txBody>
       </p:sp>
       <p:sp>
         <p:nvSpPr>
-          <p:cNvPr id="23" name="Shape 21"/>
-          <p:cNvSpPr/>
-          <p:nvPr/>
-        </p:nvSpPr>
-        <p:spPr>
-          <a:xfrm>
-            <a:off x="457200" y="3886200"/>
-            <a:ext cx="5440680" cy="1170432"/>
-          </a:xfrm>
-          <a:prstGeom prst="roundRect">
-            <a:avLst>
-              <a:gd name="adj" fmla="val 4688"/>
-            </a:avLst>
-          </a:prstGeom>
-          <a:solidFill>
-            <a:srgbClr val="F2F2F2"/>
-          </a:solidFill>
-          <a:ln/>
-          <a:effectLst>
-            <a:outerShdw blurRad="50800" dist="25400" dir="5400000" algn="bl" rotWithShape="0">
-              <a:srgbClr val="808080">
-                <a:alpha val="20000"/>
-              </a:srgbClr>
-            </a:outerShdw>
-          </a:effectLst>
-        </p:spPr>
-      </p:sp>
-      <p:sp>
-        <p:nvSpPr>
-          <p:cNvPr id="24" name="Shape 22"/>
-          <p:cNvSpPr/>
-          <p:nvPr/>
-        </p:nvSpPr>
-        <p:spPr>
-          <a:xfrm>
-            <a:off x="621792" y="4032504"/>
-            <a:ext cx="365760" cy="365760"/>
+          <p:cNvPr id="41" name="Shape 39"/>
+          <p:cNvSpPr/>
+          <p:nvPr/>
+        </p:nvSpPr>
+        <p:spPr>
+          <a:xfrm>
+            <a:off x="6748272" y="4343400"/>
+            <a:ext cx="384048" cy="384048"/>
           </a:xfrm>
           <a:prstGeom prst="ellipse">
             <a:avLst/>
@@ -39349,14 +39982,14 @@
       </p:sp>
       <p:sp>
         <p:nvSpPr>
-          <p:cNvPr id="25" name="Text 23"/>
-          <p:cNvSpPr/>
-          <p:nvPr/>
-        </p:nvSpPr>
-        <p:spPr>
-          <a:xfrm>
-            <a:off x="621792" y="4032504"/>
-            <a:ext cx="365760" cy="365760"/>
+          <p:cNvPr id="42" name="Text 40"/>
+          <p:cNvSpPr/>
+          <p:nvPr/>
+        </p:nvSpPr>
+        <p:spPr>
+          <a:xfrm>
+            <a:off x="6748272" y="4343400"/>
+            <a:ext cx="384048" cy="384048"/>
           </a:xfrm>
           <a:prstGeom prst="rect">
             <a:avLst/>
@@ -39388,14 +40021,14 @@
       </p:sp>
       <p:sp>
         <p:nvSpPr>
-          <p:cNvPr id="26" name="Text 24"/>
-          <p:cNvSpPr/>
-          <p:nvPr/>
-        </p:nvSpPr>
-        <p:spPr>
-          <a:xfrm>
-            <a:off x="1078992" y="3977640"/>
-            <a:ext cx="4654296" cy="457200"/>
+          <p:cNvPr id="43" name="Text 41"/>
+          <p:cNvSpPr/>
+          <p:nvPr/>
+        </p:nvSpPr>
+        <p:spPr>
+          <a:xfrm>
+            <a:off x="7232904" y="4288536"/>
+            <a:ext cx="4343400" cy="292608"/>
           </a:xfrm>
           <a:prstGeom prst="rect">
             <a:avLst/>
@@ -39411,46 +40044,7 @@
               <a:buNone/>
             </a:pPr>
             <a:r>
-              <a:rPr lang="en-US" sz="1100" b="1" dirty="0">
-                <a:solidFill>
-                  <a:srgbClr val="8C0924"/>
-                </a:solidFill>
-                <a:latin typeface="Calibri" pitchFamily="34" charset="0"/>
-                <a:ea typeface="Calibri" pitchFamily="34" charset="-122"/>
-                <a:cs typeface="Calibri" pitchFamily="34" charset="-120"/>
-              </a:rPr>
-              <a:t>Oracle Modernization: 26ai &amp; Autonomous DB — CONFIRMED</a:t>
-            </a:r>
-            <a:endParaRPr lang="en-US" sz="1100" dirty="0"/>
-          </a:p>
-        </p:txBody>
-      </p:sp>
-      <p:sp>
-        <p:nvSpPr>
-          <p:cNvPr id="27" name="Text 25"/>
-          <p:cNvSpPr/>
-          <p:nvPr/>
-        </p:nvSpPr>
-        <p:spPr>
-          <a:xfrm>
-            <a:off x="621792" y="4416552"/>
-            <a:ext cx="5111496" cy="594360"/>
-          </a:xfrm>
-          <a:prstGeom prst="rect">
-            <a:avLst/>
-          </a:prstGeom>
-          <a:noFill/>
-          <a:ln/>
-        </p:spPr>
-        <p:txBody>
-          <a:bodyPr wrap="square" rtlCol="0" anchor="ctr"/>
-          <a:lstStyle/>
-          <a:p>
-            <a:pPr marL="0" indent="0">
-              <a:buNone/>
-            </a:pPr>
-            <a:r>
-              <a:rPr lang="en-US" sz="800" b="1" dirty="0">
+              <a:rPr lang="en-US" sz="1200" b="1" dirty="0">
                 <a:solidFill>
                   <a:srgbClr val="2E2E38"/>
                 </a:solidFill>
@@ -39458,10 +40052,49 @@
                 <a:ea typeface="Calibri" pitchFamily="34" charset="-122"/>
                 <a:cs typeface="Calibri" pitchFamily="34" charset="-120"/>
               </a:rPr>
-              <a:t>Opportunity: </a:t>
+              <a:t>Strengthen Resilience &amp; Recovery</a:t>
+            </a:r>
+            <a:endParaRPr lang="en-US" sz="1200" dirty="0"/>
+          </a:p>
+        </p:txBody>
+      </p:sp>
+      <p:sp>
+        <p:nvSpPr>
+          <p:cNvPr id="44" name="Text 42"/>
+          <p:cNvSpPr/>
+          <p:nvPr/>
+        </p:nvSpPr>
+        <p:spPr>
+          <a:xfrm>
+            <a:off x="7232904" y="4617720"/>
+            <a:ext cx="4343400" cy="548640"/>
+          </a:xfrm>
+          <a:prstGeom prst="rect">
+            <a:avLst/>
+          </a:prstGeom>
+          <a:noFill/>
+          <a:ln/>
+        </p:spPr>
+        <p:txBody>
+          <a:bodyPr wrap="square" rtlCol="0" anchor="t"/>
+          <a:lstStyle/>
+          <a:p>
+            <a:pPr marL="0" indent="0">
+              <a:buNone/>
+            </a:pPr>
+            <a:r>
+              <a:rPr lang="en-US" sz="950" b="1" dirty="0">
+                <a:solidFill>
+                  <a:srgbClr val="BA0C2F"/>
+                </a:solidFill>
+                <a:latin typeface="Calibri" pitchFamily="34" charset="0"/>
+                <a:ea typeface="Calibri" pitchFamily="34" charset="-122"/>
+                <a:cs typeface="Calibri" pitchFamily="34" charset="-120"/>
+              </a:rPr>
+              <a:t>✓ </a:t>
             </a:r>
             <a:r>
-              <a:rPr lang="en-US" sz="800" dirty="0">
+              <a:rPr lang="en-US" sz="950" dirty="0">
                 <a:solidFill>
                   <a:srgbClr val="2E2E38"/>
                 </a:solidFill>
@@ -39469,52 +40102,30 @@
                 <a:ea typeface="Calibri" pitchFamily="34" charset="-122"/>
                 <a:cs typeface="Calibri" pitchFamily="34" charset="-120"/>
               </a:rPr>
-              <a:t>Oracle 26ai is the confirmed AI-readiness target (19c→26ai), with native Mongo-compatible storage. Autonomous Database targeted for self-healing, auto-patching ops. </a:t>
+              <a:t>Faster recovery; parity with cloud infrastructure maturity targets</a:t>
             </a:r>
-            <a:r>
-              <a:rPr lang="en-US" sz="800" b="1" dirty="0">
-                <a:solidFill>
-                  <a:srgbClr val="2E2E38"/>
-                </a:solidFill>
-                <a:latin typeface="Calibri" pitchFamily="34" charset="0"/>
-                <a:ea typeface="Calibri" pitchFamily="34" charset="-122"/>
-                <a:cs typeface="Calibri" pitchFamily="34" charset="-120"/>
-              </a:rPr>
-              <a:t>Value: </a:t>
-            </a:r>
-            <a:r>
-              <a:rPr lang="en-US" sz="800" dirty="0">
-                <a:solidFill>
-                  <a:srgbClr val="2E2E38"/>
-                </a:solidFill>
-                <a:latin typeface="Calibri" pitchFamily="34" charset="0"/>
-                <a:ea typeface="Calibri" pitchFamily="34" charset="-122"/>
-                <a:cs typeface="Calibri" pitchFamily="34" charset="-120"/>
-              </a:rPr>
-              <a:t>AI-ready platform without a separate NoSQL buildout in every case; lower ops burden.</a:t>
-            </a:r>
-            <a:endParaRPr lang="en-US" sz="800" dirty="0"/>
+            <a:endParaRPr lang="en-US" sz="950" dirty="0"/>
           </a:p>
         </p:txBody>
       </p:sp>
       <p:sp>
         <p:nvSpPr>
-          <p:cNvPr id="28" name="Shape 26"/>
-          <p:cNvSpPr/>
-          <p:nvPr/>
-        </p:nvSpPr>
-        <p:spPr>
-          <a:xfrm>
-            <a:off x="6080760" y="3886200"/>
-            <a:ext cx="5440680" cy="1170432"/>
+          <p:cNvPr id="45" name="Shape 43"/>
+          <p:cNvSpPr/>
+          <p:nvPr/>
+        </p:nvSpPr>
+        <p:spPr>
+          <a:xfrm>
+            <a:off x="6611112" y="5248656"/>
+            <a:ext cx="5120640" cy="1033272"/>
           </a:xfrm>
           <a:prstGeom prst="roundRect">
             <a:avLst>
-              <a:gd name="adj" fmla="val 4688"/>
+              <a:gd name="adj" fmla="val 5310"/>
             </a:avLst>
           </a:prstGeom>
           <a:solidFill>
-            <a:srgbClr val="F0CCD2"/>
+            <a:srgbClr val="F2F2F2"/>
           </a:solidFill>
           <a:ln/>
           <a:effectLst>
@@ -39528,14 +40139,14 @@
       </p:sp>
       <p:sp>
         <p:nvSpPr>
-          <p:cNvPr id="29" name="Shape 27"/>
-          <p:cNvSpPr/>
-          <p:nvPr/>
-        </p:nvSpPr>
-        <p:spPr>
-          <a:xfrm>
-            <a:off x="6245352" y="4032504"/>
-            <a:ext cx="365760" cy="365760"/>
+          <p:cNvPr id="46" name="Shape 44"/>
+          <p:cNvSpPr/>
+          <p:nvPr/>
+        </p:nvSpPr>
+        <p:spPr>
+          <a:xfrm>
+            <a:off x="6748272" y="5376672"/>
+            <a:ext cx="384048" cy="384048"/>
           </a:xfrm>
           <a:prstGeom prst="ellipse">
             <a:avLst/>
@@ -39548,14 +40159,14 @@
       </p:sp>
       <p:sp>
         <p:nvSpPr>
-          <p:cNvPr id="30" name="Text 28"/>
-          <p:cNvSpPr/>
-          <p:nvPr/>
-        </p:nvSpPr>
-        <p:spPr>
-          <a:xfrm>
-            <a:off x="6245352" y="4032504"/>
-            <a:ext cx="365760" cy="365760"/>
+          <p:cNvPr id="47" name="Text 45"/>
+          <p:cNvSpPr/>
+          <p:nvPr/>
+        </p:nvSpPr>
+        <p:spPr>
+          <a:xfrm>
+            <a:off x="6748272" y="5376672"/>
+            <a:ext cx="384048" cy="384048"/>
           </a:xfrm>
           <a:prstGeom prst="rect">
             <a:avLst/>
@@ -39587,14 +40198,14 @@
       </p:sp>
       <p:sp>
         <p:nvSpPr>
-          <p:cNvPr id="31" name="Text 29"/>
-          <p:cNvSpPr/>
-          <p:nvPr/>
-        </p:nvSpPr>
-        <p:spPr>
-          <a:xfrm>
-            <a:off x="6702552" y="3977640"/>
-            <a:ext cx="4654296" cy="457200"/>
+          <p:cNvPr id="48" name="Text 46"/>
+          <p:cNvSpPr/>
+          <p:nvPr/>
+        </p:nvSpPr>
+        <p:spPr>
+          <a:xfrm>
+            <a:off x="7232904" y="5321808"/>
+            <a:ext cx="4343400" cy="292608"/>
           </a:xfrm>
           <a:prstGeom prst="rect">
             <a:avLst/>
@@ -39610,46 +40221,7 @@
               <a:buNone/>
             </a:pPr>
             <a:r>
-              <a:rPr lang="en-US" sz="1100" b="1" dirty="0">
-                <a:solidFill>
-                  <a:srgbClr val="8C0924"/>
-                </a:solidFill>
-                <a:latin typeface="Calibri" pitchFamily="34" charset="0"/>
-                <a:ea typeface="Calibri" pitchFamily="34" charset="-122"/>
-                <a:cs typeface="Calibri" pitchFamily="34" charset="-120"/>
-              </a:rPr>
-              <a:t>Resilience &amp; DR Modernization (Broader Estate)</a:t>
-            </a:r>
-            <a:endParaRPr lang="en-US" sz="1100" dirty="0"/>
-          </a:p>
-        </p:txBody>
-      </p:sp>
-      <p:sp>
-        <p:nvSpPr>
-          <p:cNvPr id="32" name="Text 30"/>
-          <p:cNvSpPr/>
-          <p:nvPr/>
-        </p:nvSpPr>
-        <p:spPr>
-          <a:xfrm>
-            <a:off x="6245352" y="4416552"/>
-            <a:ext cx="5111496" cy="594360"/>
-          </a:xfrm>
-          <a:prstGeom prst="rect">
-            <a:avLst/>
-          </a:prstGeom>
-          <a:noFill/>
-          <a:ln/>
-        </p:spPr>
-        <p:txBody>
-          <a:bodyPr wrap="square" rtlCol="0" anchor="ctr"/>
-          <a:lstStyle/>
-          <a:p>
-            <a:pPr marL="0" indent="0">
-              <a:buNone/>
-            </a:pPr>
-            <a:r>
-              <a:rPr lang="en-US" sz="800" b="1" dirty="0">
+              <a:rPr lang="en-US" sz="1200" b="1" dirty="0">
                 <a:solidFill>
                   <a:srgbClr val="2E2E38"/>
                 </a:solidFill>
@@ -39657,10 +40229,49 @@
                 <a:ea typeface="Calibri" pitchFamily="34" charset="-122"/>
                 <a:cs typeface="Calibri" pitchFamily="34" charset="-120"/>
               </a:rPr>
-              <a:t>Opportunity: </a:t>
+              <a:t>Streamline the Operating Model</a:t>
+            </a:r>
+            <a:endParaRPr lang="en-US" sz="1200" dirty="0"/>
+          </a:p>
+        </p:txBody>
+      </p:sp>
+      <p:sp>
+        <p:nvSpPr>
+          <p:cNvPr id="49" name="Text 47"/>
+          <p:cNvSpPr/>
+          <p:nvPr/>
+        </p:nvSpPr>
+        <p:spPr>
+          <a:xfrm>
+            <a:off x="7232904" y="5650992"/>
+            <a:ext cx="4343400" cy="548640"/>
+          </a:xfrm>
+          <a:prstGeom prst="rect">
+            <a:avLst/>
+          </a:prstGeom>
+          <a:noFill/>
+          <a:ln/>
+        </p:spPr>
+        <p:txBody>
+          <a:bodyPr wrap="square" rtlCol="0" anchor="t"/>
+          <a:lstStyle/>
+          <a:p>
+            <a:pPr marL="0" indent="0">
+              <a:buNone/>
+            </a:pPr>
+            <a:r>
+              <a:rPr lang="en-US" sz="950" b="1" dirty="0">
+                <a:solidFill>
+                  <a:srgbClr val="BA0C2F"/>
+                </a:solidFill>
+                <a:latin typeface="Calibri" pitchFamily="34" charset="0"/>
+                <a:ea typeface="Calibri" pitchFamily="34" charset="-122"/>
+                <a:cs typeface="Calibri" pitchFamily="34" charset="-120"/>
+              </a:rPr>
+              <a:t>✓ </a:t>
             </a:r>
             <a:r>
-              <a:rPr lang="en-US" sz="800" dirty="0">
+              <a:rPr lang="en-US" sz="950" dirty="0">
                 <a:solidFill>
                   <a:srgbClr val="2E2E38"/>
                 </a:solidFill>
@@ -39668,429 +40279,9 @@
                 <a:ea typeface="Calibri" pitchFamily="34" charset="-122"/>
                 <a:cs typeface="Calibri" pitchFamily="34" charset="-120"/>
               </a:rPr>
-              <a:t>Extend the resilience thinking already applied to Exa@Azure (tiered SLA, multi-region) to the rest of the estate. </a:t>
+              <a:t>Faster provisioning; reduced operational friction</a:t>
             </a:r>
-            <a:r>
-              <a:rPr lang="en-US" sz="800" b="1" dirty="0">
-                <a:solidFill>
-                  <a:srgbClr val="2E2E38"/>
-                </a:solidFill>
-                <a:latin typeface="Calibri" pitchFamily="34" charset="0"/>
-                <a:ea typeface="Calibri" pitchFamily="34" charset="-122"/>
-                <a:cs typeface="Calibri" pitchFamily="34" charset="-120"/>
-              </a:rPr>
-              <a:t>Value: </a:t>
-            </a:r>
-            <a:r>
-              <a:rPr lang="en-US" sz="800" dirty="0">
-                <a:solidFill>
-                  <a:srgbClr val="2E2E38"/>
-                </a:solidFill>
-                <a:latin typeface="Calibri" pitchFamily="34" charset="0"/>
-                <a:ea typeface="Calibri" pitchFamily="34" charset="-122"/>
-                <a:cs typeface="Calibri" pitchFamily="34" charset="-120"/>
-              </a:rPr>
-              <a:t>Faster recovery; parity with cloud infrastructure's maturity targets.</a:t>
-            </a:r>
-            <a:endParaRPr lang="en-US" sz="800" dirty="0"/>
-          </a:p>
-        </p:txBody>
-      </p:sp>
-      <p:sp>
-        <p:nvSpPr>
-          <p:cNvPr id="33" name="Shape 31"/>
-          <p:cNvSpPr/>
-          <p:nvPr/>
-        </p:nvSpPr>
-        <p:spPr>
-          <a:xfrm>
-            <a:off x="457200" y="5166360"/>
-            <a:ext cx="5440680" cy="1170432"/>
-          </a:xfrm>
-          <a:prstGeom prst="roundRect">
-            <a:avLst>
-              <a:gd name="adj" fmla="val 4688"/>
-            </a:avLst>
-          </a:prstGeom>
-          <a:solidFill>
-            <a:srgbClr val="F2F2F2"/>
-          </a:solidFill>
-          <a:ln/>
-          <a:effectLst>
-            <a:outerShdw blurRad="50800" dist="25400" dir="5400000" algn="bl" rotWithShape="0">
-              <a:srgbClr val="808080">
-                <a:alpha val="20000"/>
-              </a:srgbClr>
-            </a:outerShdw>
-          </a:effectLst>
-        </p:spPr>
-      </p:sp>
-      <p:sp>
-        <p:nvSpPr>
-          <p:cNvPr id="34" name="Shape 32"/>
-          <p:cNvSpPr/>
-          <p:nvPr/>
-        </p:nvSpPr>
-        <p:spPr>
-          <a:xfrm>
-            <a:off x="621792" y="5312664"/>
-            <a:ext cx="365760" cy="365760"/>
-          </a:xfrm>
-          <a:prstGeom prst="ellipse">
-            <a:avLst/>
-          </a:prstGeom>
-          <a:solidFill>
-            <a:srgbClr val="BA0C2F"/>
-          </a:solidFill>
-          <a:ln/>
-        </p:spPr>
-      </p:sp>
-      <p:sp>
-        <p:nvSpPr>
-          <p:cNvPr id="35" name="Text 33"/>
-          <p:cNvSpPr/>
-          <p:nvPr/>
-        </p:nvSpPr>
-        <p:spPr>
-          <a:xfrm>
-            <a:off x="621792" y="5312664"/>
-            <a:ext cx="365760" cy="365760"/>
-          </a:xfrm>
-          <a:prstGeom prst="rect">
-            <a:avLst/>
-          </a:prstGeom>
-          <a:noFill/>
-          <a:ln/>
-        </p:spPr>
-        <p:txBody>
-          <a:bodyPr wrap="square" rtlCol="0" anchor="ctr"/>
-          <a:lstStyle/>
-          <a:p>
-            <a:pPr marL="0" indent="0" algn="ctr">
-              <a:buNone/>
-            </a:pPr>
-            <a:r>
-              <a:rPr lang="en-US" sz="1200" b="1" dirty="0">
-                <a:solidFill>
-                  <a:srgbClr val="FFFFFF"/>
-                </a:solidFill>
-                <a:latin typeface="Calibri" pitchFamily="34" charset="0"/>
-                <a:ea typeface="Calibri" pitchFamily="34" charset="-122"/>
-                <a:cs typeface="Calibri" pitchFamily="34" charset="-120"/>
-              </a:rPr>
-              <a:t>5</a:t>
-            </a:r>
-            <a:endParaRPr lang="en-US" sz="1200" dirty="0"/>
-          </a:p>
-        </p:txBody>
-      </p:sp>
-      <p:sp>
-        <p:nvSpPr>
-          <p:cNvPr id="36" name="Text 34"/>
-          <p:cNvSpPr/>
-          <p:nvPr/>
-        </p:nvSpPr>
-        <p:spPr>
-          <a:xfrm>
-            <a:off x="1078992" y="5257800"/>
-            <a:ext cx="4654296" cy="457200"/>
-          </a:xfrm>
-          <a:prstGeom prst="rect">
-            <a:avLst/>
-          </a:prstGeom>
-          <a:noFill/>
-          <a:ln/>
-        </p:spPr>
-        <p:txBody>
-          <a:bodyPr wrap="square" rtlCol="0" anchor="ctr"/>
-          <a:lstStyle/>
-          <a:p>
-            <a:pPr marL="0" indent="0">
-              <a:buNone/>
-            </a:pPr>
-            <a:r>
-              <a:rPr lang="en-US" sz="1100" b="1" dirty="0">
-                <a:solidFill>
-                  <a:srgbClr val="8C0924"/>
-                </a:solidFill>
-                <a:latin typeface="Calibri" pitchFamily="34" charset="0"/>
-                <a:ea typeface="Calibri" pitchFamily="34" charset="-122"/>
-                <a:cs typeface="Calibri" pitchFamily="34" charset="-120"/>
-              </a:rPr>
-              <a:t>NoSQL/Postgres &amp; Graph/Vector Placement Policy</a:t>
-            </a:r>
-            <a:endParaRPr lang="en-US" sz="1100" dirty="0"/>
-          </a:p>
-        </p:txBody>
-      </p:sp>
-      <p:sp>
-        <p:nvSpPr>
-          <p:cNvPr id="37" name="Text 35"/>
-          <p:cNvSpPr/>
-          <p:nvPr/>
-        </p:nvSpPr>
-        <p:spPr>
-          <a:xfrm>
-            <a:off x="621792" y="5696712"/>
-            <a:ext cx="5111496" cy="594360"/>
-          </a:xfrm>
-          <a:prstGeom prst="rect">
-            <a:avLst/>
-          </a:prstGeom>
-          <a:noFill/>
-          <a:ln/>
-        </p:spPr>
-        <p:txBody>
-          <a:bodyPr wrap="square" rtlCol="0" anchor="ctr"/>
-          <a:lstStyle/>
-          <a:p>
-            <a:pPr marL="0" indent="0">
-              <a:buNone/>
-            </a:pPr>
-            <a:r>
-              <a:rPr lang="en-US" sz="800" b="1" dirty="0">
-                <a:solidFill>
-                  <a:srgbClr val="2E2E38"/>
-                </a:solidFill>
-                <a:latin typeface="Calibri" pitchFamily="34" charset="0"/>
-                <a:ea typeface="Calibri" pitchFamily="34" charset="-122"/>
-                <a:cs typeface="Calibri" pitchFamily="34" charset="-120"/>
-              </a:rPr>
-              <a:t>Opportunity: </a:t>
-            </a:r>
-            <a:r>
-              <a:rPr lang="en-US" sz="800" dirty="0">
-                <a:solidFill>
-                  <a:srgbClr val="2E2E38"/>
-                </a:solidFill>
-                <a:latin typeface="Calibri" pitchFamily="34" charset="0"/>
-                <a:ea typeface="Calibri" pitchFamily="34" charset="-122"/>
-                <a:cs typeface="Calibri" pitchFamily="34" charset="-120"/>
-              </a:rPr>
-              <a:t>MongoDB Atlas, AWS RDS PostgreSQL, and now Oracle 26ai's native Mongo storage all need a single placement policy alongside NORTH's Neo4j/vector direction. </a:t>
-            </a:r>
-            <a:r>
-              <a:rPr lang="en-US" sz="800" b="1" dirty="0">
-                <a:solidFill>
-                  <a:srgbClr val="2E2E38"/>
-                </a:solidFill>
-                <a:latin typeface="Calibri" pitchFamily="34" charset="0"/>
-                <a:ea typeface="Calibri" pitchFamily="34" charset="-122"/>
-                <a:cs typeface="Calibri" pitchFamily="34" charset="-120"/>
-              </a:rPr>
-              <a:t>Value: </a:t>
-            </a:r>
-            <a:r>
-              <a:rPr lang="en-US" sz="800" dirty="0">
-                <a:solidFill>
-                  <a:srgbClr val="2E2E38"/>
-                </a:solidFill>
-                <a:latin typeface="Calibri" pitchFamily="34" charset="0"/>
-                <a:ea typeface="Calibri" pitchFamily="34" charset="-122"/>
-                <a:cs typeface="Calibri" pitchFamily="34" charset="-120"/>
-              </a:rPr>
-              <a:t>Removes ambiguity for teams evaluating NoSQL/Postgres/graph/vector.</a:t>
-            </a:r>
-            <a:endParaRPr lang="en-US" sz="800" dirty="0"/>
-          </a:p>
-        </p:txBody>
-      </p:sp>
-      <p:sp>
-        <p:nvSpPr>
-          <p:cNvPr id="38" name="Shape 36"/>
-          <p:cNvSpPr/>
-          <p:nvPr/>
-        </p:nvSpPr>
-        <p:spPr>
-          <a:xfrm>
-            <a:off x="6080760" y="5166360"/>
-            <a:ext cx="5440680" cy="1170432"/>
-          </a:xfrm>
-          <a:prstGeom prst="roundRect">
-            <a:avLst>
-              <a:gd name="adj" fmla="val 4688"/>
-            </a:avLst>
-          </a:prstGeom>
-          <a:solidFill>
-            <a:srgbClr val="F0CCD2"/>
-          </a:solidFill>
-          <a:ln/>
-          <a:effectLst>
-            <a:outerShdw blurRad="50800" dist="25400" dir="5400000" algn="bl" rotWithShape="0">
-              <a:srgbClr val="808080">
-                <a:alpha val="20000"/>
-              </a:srgbClr>
-            </a:outerShdw>
-          </a:effectLst>
-        </p:spPr>
-      </p:sp>
-      <p:sp>
-        <p:nvSpPr>
-          <p:cNvPr id="39" name="Shape 37"/>
-          <p:cNvSpPr/>
-          <p:nvPr/>
-        </p:nvSpPr>
-        <p:spPr>
-          <a:xfrm>
-            <a:off x="6245352" y="5312664"/>
-            <a:ext cx="365760" cy="365760"/>
-          </a:xfrm>
-          <a:prstGeom prst="ellipse">
-            <a:avLst/>
-          </a:prstGeom>
-          <a:solidFill>
-            <a:srgbClr val="BA0C2F"/>
-          </a:solidFill>
-          <a:ln/>
-        </p:spPr>
-      </p:sp>
-      <p:sp>
-        <p:nvSpPr>
-          <p:cNvPr id="40" name="Text 38"/>
-          <p:cNvSpPr/>
-          <p:nvPr/>
-        </p:nvSpPr>
-        <p:spPr>
-          <a:xfrm>
-            <a:off x="6245352" y="5312664"/>
-            <a:ext cx="365760" cy="365760"/>
-          </a:xfrm>
-          <a:prstGeom prst="rect">
-            <a:avLst/>
-          </a:prstGeom>
-          <a:noFill/>
-          <a:ln/>
-        </p:spPr>
-        <p:txBody>
-          <a:bodyPr wrap="square" rtlCol="0" anchor="ctr"/>
-          <a:lstStyle/>
-          <a:p>
-            <a:pPr marL="0" indent="0" algn="ctr">
-              <a:buNone/>
-            </a:pPr>
-            <a:r>
-              <a:rPr lang="en-US" sz="1200" b="1" dirty="0">
-                <a:solidFill>
-                  <a:srgbClr val="FFFFFF"/>
-                </a:solidFill>
-                <a:latin typeface="Calibri" pitchFamily="34" charset="0"/>
-                <a:ea typeface="Calibri" pitchFamily="34" charset="-122"/>
-                <a:cs typeface="Calibri" pitchFamily="34" charset="-120"/>
-              </a:rPr>
-              <a:t>6</a:t>
-            </a:r>
-            <a:endParaRPr lang="en-US" sz="1200" dirty="0"/>
-          </a:p>
-        </p:txBody>
-      </p:sp>
-      <p:sp>
-        <p:nvSpPr>
-          <p:cNvPr id="41" name="Text 39"/>
-          <p:cNvSpPr/>
-          <p:nvPr/>
-        </p:nvSpPr>
-        <p:spPr>
-          <a:xfrm>
-            <a:off x="6702552" y="5257800"/>
-            <a:ext cx="4654296" cy="457200"/>
-          </a:xfrm>
-          <a:prstGeom prst="rect">
-            <a:avLst/>
-          </a:prstGeom>
-          <a:noFill/>
-          <a:ln/>
-        </p:spPr>
-        <p:txBody>
-          <a:bodyPr wrap="square" rtlCol="0" anchor="ctr"/>
-          <a:lstStyle/>
-          <a:p>
-            <a:pPr marL="0" indent="0">
-              <a:buNone/>
-            </a:pPr>
-            <a:r>
-              <a:rPr lang="en-US" sz="1100" b="1" dirty="0">
-                <a:solidFill>
-                  <a:srgbClr val="8C0924"/>
-                </a:solidFill>
-                <a:latin typeface="Calibri" pitchFamily="34" charset="0"/>
-                <a:ea typeface="Calibri" pitchFamily="34" charset="-122"/>
-                <a:cs typeface="Calibri" pitchFamily="34" charset="-120"/>
-              </a:rPr>
-              <a:t>Operating Model Evolution</a:t>
-            </a:r>
-            <a:endParaRPr lang="en-US" sz="1100" dirty="0"/>
-          </a:p>
-        </p:txBody>
-      </p:sp>
-      <p:sp>
-        <p:nvSpPr>
-          <p:cNvPr id="42" name="Text 40"/>
-          <p:cNvSpPr/>
-          <p:nvPr/>
-        </p:nvSpPr>
-        <p:spPr>
-          <a:xfrm>
-            <a:off x="6245352" y="5696712"/>
-            <a:ext cx="5111496" cy="594360"/>
-          </a:xfrm>
-          <a:prstGeom prst="rect">
-            <a:avLst/>
-          </a:prstGeom>
-          <a:noFill/>
-          <a:ln/>
-        </p:spPr>
-        <p:txBody>
-          <a:bodyPr wrap="square" rtlCol="0" anchor="ctr"/>
-          <a:lstStyle/>
-          <a:p>
-            <a:pPr marL="0" indent="0">
-              <a:buNone/>
-            </a:pPr>
-            <a:r>
-              <a:rPr lang="en-US" sz="800" b="1" dirty="0">
-                <a:solidFill>
-                  <a:srgbClr val="2E2E38"/>
-                </a:solidFill>
-                <a:latin typeface="Calibri" pitchFamily="34" charset="0"/>
-                <a:ea typeface="Calibri" pitchFamily="34" charset="-122"/>
-                <a:cs typeface="Calibri" pitchFamily="34" charset="-120"/>
-              </a:rPr>
-              <a:t>Opportunity: </a:t>
-            </a:r>
-            <a:r>
-              <a:rPr lang="en-US" sz="800" dirty="0">
-                <a:solidFill>
-                  <a:srgbClr val="2E2E38"/>
-                </a:solidFill>
-                <a:latin typeface="Calibri" pitchFamily="34" charset="0"/>
-                <a:ea typeface="Calibri" pitchFamily="34" charset="-122"/>
-                <a:cs typeface="Calibri" pitchFamily="34" charset="-120"/>
-              </a:rPr>
-              <a:t>Assess whether the HCL-managed, ticket-driven model should shift toward more self-service. Lower priority given generally low technical debt. </a:t>
-            </a:r>
-            <a:r>
-              <a:rPr lang="en-US" sz="800" b="1" dirty="0">
-                <a:solidFill>
-                  <a:srgbClr val="2E2E38"/>
-                </a:solidFill>
-                <a:latin typeface="Calibri" pitchFamily="34" charset="0"/>
-                <a:ea typeface="Calibri" pitchFamily="34" charset="-122"/>
-                <a:cs typeface="Calibri" pitchFamily="34" charset="-120"/>
-              </a:rPr>
-              <a:t>Value: </a:t>
-            </a:r>
-            <a:r>
-              <a:rPr lang="en-US" sz="800" dirty="0">
-                <a:solidFill>
-                  <a:srgbClr val="2E2E38"/>
-                </a:solidFill>
-                <a:latin typeface="Calibri" pitchFamily="34" charset="0"/>
-                <a:ea typeface="Calibri" pitchFamily="34" charset="-122"/>
-                <a:cs typeface="Calibri" pitchFamily="34" charset="-120"/>
-              </a:rPr>
-              <a:t>Faster provisioning; reduced operational friction.</a:t>
-            </a:r>
-            <a:endParaRPr lang="en-US" sz="800" dirty="0"/>
+            <a:endParaRPr lang="en-US" sz="950" dirty="0"/>
           </a:p>
         </p:txBody>
       </p:sp>
